--- a/youtube-slides/rt-PA血栓溶解療法/rt-PA血栓溶解療法.pptx
+++ b/youtube-slides/rt-PA血栓溶解療法/rt-PA血栓溶解療法.pptx
@@ -8840,7 +8840,7 @@
                 <a:ea typeface="BIZ UDPGothic" pitchFamily="34" charset="-122"/>
                 <a:cs typeface="BIZ UDPGothic" pitchFamily="34" charset="-120"/>
               </a:rPr>
-              <a:t>日本脳卒中学会 脳卒中治療ガイドライン2025（改訂版）</a:t>
+              <a:t>日本脳卒中学会 脳卒中治療ガイドライン2021〔改訂2025〕</a:t>
             </a:r>
             <a:endParaRPr lang="en-US" sz="1400" dirty="0"/>
           </a:p>
